--- a/doc/NeighborTrade_완료발표_20260618_작업01.pptx
+++ b/doc/NeighborTrade_완료발표_20260618_작업01.pptx
@@ -1,34 +1,34 @@
 
 <file path=ppt/presentation.xml><?xml version="1.0" encoding="utf-8"?>
-<p:presentation xmlns:a="http://schemas.openxmlformats.org/drawingml/2006/main" xmlns:r="http://schemas.openxmlformats.org/officeDocument/2006/relationships" xmlns:p="http://schemas.openxmlformats.org/presentationml/2006/main" saveSubsetFonts="1" autoCompressPictures="0">
+<p:presentation xmlns:r="http://schemas.openxmlformats.org/officeDocument/2006/relationships" xmlns:c="http://schemas.openxmlformats.org/drawingml/2006/chart" xmlns:a="http://schemas.openxmlformats.org/drawingml/2006/main" xmlns:dgm="http://schemas.openxmlformats.org/drawingml/2006/diagram" xmlns:dsp="http://schemas.microsoft.com/office/drawing/2008/diagram" xmlns:p="http://schemas.openxmlformats.org/presentationml/2006/main" autoCompressPictures="0">
   <p:sldMasterIdLst>
-    <p:sldMasterId id="2147483648" r:id="rId1"/>
+    <p:sldMasterId id="2147483650" r:id="rId1"/>
   </p:sldMasterIdLst>
+  <p:notesMasterIdLst>
+    <p:notesMasterId r:id="rId2"/>
+  </p:notesMasterIdLst>
   <p:sldIdLst>
-    <p:sldId id="256" r:id="rId2"/>
-    <p:sldId id="257" r:id="rId3"/>
-    <p:sldId id="258" r:id="rId4"/>
-    <p:sldId id="259" r:id="rId5"/>
-    <p:sldId id="260" r:id="rId6"/>
-    <p:sldId id="261" r:id="rId7"/>
-    <p:sldId id="262" r:id="rId8"/>
-    <p:sldId id="263" r:id="rId9"/>
-    <p:sldId id="264" r:id="rId10"/>
-    <p:sldId id="265" r:id="rId11"/>
-    <p:sldId id="266" r:id="rId12"/>
-    <p:sldId id="267" r:id="rId13"/>
-    <p:sldId id="268" r:id="rId14"/>
-    <p:sldId id="269" r:id="rId15"/>
-    <p:sldId id="270" r:id="rId16"/>
-    <p:sldId id="271" r:id="rId17"/>
-    <p:sldId id="272" r:id="rId18"/>
-    <p:sldId id="273" r:id="rId19"/>
-    <p:sldId id="274" r:id="rId25"/>
-    <p:sldId id="275" r:id="rId26"/>
+    <p:sldId id="256" r:id="rId3"/>
+    <p:sldId id="257" r:id="rId4"/>
+    <p:sldId id="258" r:id="rId5"/>
+    <p:sldId id="259" r:id="rId6"/>
+    <p:sldId id="260" r:id="rId7"/>
+    <p:sldId id="261" r:id="rId8"/>
+    <p:sldId id="262" r:id="rId9"/>
+    <p:sldId id="263" r:id="rId10"/>
+    <p:sldId id="264" r:id="rId11"/>
+    <p:sldId id="265" r:id="rId12"/>
+    <p:sldId id="266" r:id="rId13"/>
+    <p:sldId id="267" r:id="rId14"/>
+    <p:sldId id="268" r:id="rId15"/>
+    <p:sldId id="269" r:id="rId16"/>
+    <p:sldId id="270" r:id="rId17"/>
+    <p:sldId id="271" r:id="rId18"/>
+    <p:sldId id="272" r:id="rId19"/>
+    <p:sldId id="273" r:id="rId20"/>
+    <p:sldId id="274" r:id="rId21"/>
+    <p:sldId id="275" r:id="rId22"/>
   </p:sldIdLst>
-  <p:notesMasterIdLst>
-    <p:notesMasterId r:id="rId20"/>
-  </p:notesMasterIdLst>
   <p:sldSz cx="12191695" cy="6858000"/>
   <p:notesSz cx="6858000" cy="12191695"/>
   <p:defaultTextStyle>
@@ -127,7 +127,7 @@
 </file>
 
 <file path=ppt/notesMasters/notesMaster1.xml><?xml version="1.0" encoding="utf-8"?>
-<p:notesMaster xmlns:a="http://schemas.openxmlformats.org/drawingml/2006/main" xmlns:r="http://schemas.openxmlformats.org/officeDocument/2006/relationships" xmlns:p="http://schemas.openxmlformats.org/presentationml/2006/main">
+<p:notesMaster xmlns:r="http://schemas.openxmlformats.org/officeDocument/2006/relationships" xmlns:c="http://schemas.openxmlformats.org/drawingml/2006/chart" xmlns:a="http://schemas.openxmlformats.org/drawingml/2006/main" xmlns:dgm="http://schemas.openxmlformats.org/drawingml/2006/diagram" xmlns:dsp="http://schemas.microsoft.com/office/drawing/2008/diagram" xmlns:p="http://schemas.openxmlformats.org/presentationml/2006/main">
   <p:cSld>
     <p:bg>
       <p:bgRef idx="1001">
@@ -155,7 +155,7 @@
             <a:spLocks noGrp="1"/>
           </p:cNvSpPr>
           <p:nvPr>
-            <p:ph type="hdr" sz="quarter"/>
+            <p:ph type="hdr" sz="quarter" idx="0"/>
           </p:nvPr>
         </p:nvSpPr>
         <p:spPr>
@@ -168,14 +168,21 @@
           </a:prstGeom>
         </p:spPr>
         <p:txBody>
-          <a:bodyPr vert="horz" lIns="91440" tIns="45720" rIns="91440" bIns="45720" rtlCol="0"/>
+          <a:bodyPr vert="horz" lIns="91440" tIns="45720" rIns="91440" bIns="45720"/>
           <a:lstStyle>
             <a:lvl1pPr algn="l">
               <a:defRPr sz="1200"/>
             </a:lvl1pPr>
           </a:lstStyle>
           <a:p>
-            <a:endParaRPr lang="en-US"/>
+            <a:pPr lvl="0">
+              <a:defRPr/>
+            </a:pPr>
+            <a:r>
+              <a:rPr lang="ko-KR" altLang="en-US"/>
+              <a:t/>
+            </a:r>
+            <a:endParaRPr lang="ko-KR" altLang="en-US"/>
           </a:p>
         </p:txBody>
       </p:sp>
@@ -199,16 +206,22 @@
           </a:prstGeom>
         </p:spPr>
         <p:txBody>
-          <a:bodyPr vert="horz" lIns="91440" tIns="45720" rIns="91440" bIns="45720" rtlCol="0"/>
+          <a:bodyPr vert="horz" lIns="91440" tIns="45720" rIns="91440" bIns="45720"/>
           <a:lstStyle>
             <a:lvl1pPr algn="r">
               <a:defRPr sz="1200"/>
             </a:lvl1pPr>
           </a:lstStyle>
           <a:p>
-            <a:fld id="{5282F153-3F37-0F45-9E97-73ACFA13230C}" type="datetimeFigureOut">
+            <a:pPr lvl="0">
+              <a:defRPr/>
+            </a:pPr>
+            <a:fld id="{5282F153-3F37-0F45-9E97-73ACFA13230C}" type="datetime1">
               <a:rPr lang="en-US"/>
-              <a:t>7/23/19</a:t>
+              <a:pPr lvl="0">
+                <a:defRPr/>
+              </a:pPr>
+              <a:t>6/18/2026</a:t>
             </a:fld>
             <a:endParaRPr lang="en-US"/>
           </a:p>
@@ -218,7 +231,7 @@
         <p:nvSpPr>
           <p:cNvPr id="4" name="Slide Image Placeholder 3"/>
           <p:cNvSpPr>
-            <a:spLocks noGrp="1" noRot="1" noChangeAspect="1"/>
+            <a:spLocks noGrp="1" noRot="1" noChangeAspect="1" noTextEdit="1"/>
           </p:cNvSpPr>
           <p:nvPr>
             <p:ph type="sldImg" idx="2"/>
@@ -240,9 +253,12 @@
           </a:ln>
         </p:spPr>
         <p:txBody>
-          <a:bodyPr vert="horz" lIns="91440" tIns="45720" rIns="91440" bIns="45720" rtlCol="0" anchor="ctr"/>
-          <a:lstStyle/>
-          <a:p>
+          <a:bodyPr vert="horz" lIns="91440" tIns="45720" rIns="91440" bIns="45720" anchor="ctr"/>
+          <a:lstStyle/>
+          <a:p>
+            <a:pPr lvl="0">
+              <a:defRPr/>
+            </a:pPr>
             <a:endParaRPr lang="en-US"/>
           </a:p>
         </p:txBody>
@@ -267,42 +283,57 @@
           </a:prstGeom>
         </p:spPr>
         <p:txBody>
-          <a:bodyPr vert="horz" lIns="91440" tIns="45720" rIns="91440" bIns="45720" rtlCol="0"/>
-          <a:lstStyle/>
-          <a:p>
-            <a:pPr lvl="0"/>
+          <a:bodyPr vert="horz" lIns="91440" tIns="45720" rIns="91440" bIns="45720"/>
+          <a:lstStyle/>
+          <a:p>
+            <a:pPr lvl="0">
+              <a:defRPr/>
+            </a:pPr>
             <a:r>
               <a:rPr lang="en-US"/>
               <a:t>Click to edit Master text styles</a:t>
             </a:r>
-          </a:p>
-          <a:p>
-            <a:pPr lvl="1"/>
+            <a:endParaRPr lang="en-US"/>
+          </a:p>
+          <a:p>
+            <a:pPr lvl="1">
+              <a:defRPr/>
+            </a:pPr>
             <a:r>
               <a:rPr lang="en-US"/>
               <a:t>Second level</a:t>
             </a:r>
-          </a:p>
-          <a:p>
-            <a:pPr lvl="2"/>
+            <a:endParaRPr lang="en-US"/>
+          </a:p>
+          <a:p>
+            <a:pPr lvl="2">
+              <a:defRPr/>
+            </a:pPr>
             <a:r>
               <a:rPr lang="en-US"/>
               <a:t>Third level</a:t>
             </a:r>
-          </a:p>
-          <a:p>
-            <a:pPr lvl="3"/>
+            <a:endParaRPr lang="en-US"/>
+          </a:p>
+          <a:p>
+            <a:pPr lvl="3">
+              <a:defRPr/>
+            </a:pPr>
             <a:r>
               <a:rPr lang="en-US"/>
               <a:t>Fourth level</a:t>
             </a:r>
-          </a:p>
-          <a:p>
-            <a:pPr lvl="4"/>
+            <a:endParaRPr lang="en-US"/>
+          </a:p>
+          <a:p>
+            <a:pPr lvl="4">
+              <a:defRPr/>
+            </a:pPr>
             <a:r>
               <a:rPr lang="en-US"/>
               <a:t>Fifth level</a:t>
             </a:r>
+            <a:endParaRPr lang="en-US"/>
           </a:p>
         </p:txBody>
       </p:sp>
@@ -326,14 +357,21 @@
           </a:prstGeom>
         </p:spPr>
         <p:txBody>
-          <a:bodyPr vert="horz" lIns="91440" tIns="45720" rIns="91440" bIns="45720" rtlCol="0" anchor="b"/>
+          <a:bodyPr vert="horz" lIns="91440" tIns="45720" rIns="91440" bIns="45720" anchor="b"/>
           <a:lstStyle>
             <a:lvl1pPr algn="l">
               <a:defRPr sz="1200"/>
             </a:lvl1pPr>
           </a:lstStyle>
           <a:p>
-            <a:endParaRPr lang="en-US"/>
+            <a:pPr lvl="0">
+              <a:defRPr/>
+            </a:pPr>
+            <a:r>
+              <a:rPr lang="ko-KR" altLang="en-US"/>
+              <a:t/>
+            </a:r>
+            <a:endParaRPr lang="ko-KR" altLang="en-US"/>
           </a:p>
         </p:txBody>
       </p:sp>
@@ -357,15 +395,21 @@
           </a:prstGeom>
         </p:spPr>
         <p:txBody>
-          <a:bodyPr vert="horz" lIns="91440" tIns="45720" rIns="91440" bIns="45720" rtlCol="0" anchor="b"/>
+          <a:bodyPr vert="horz" lIns="91440" tIns="45720" rIns="91440" bIns="45720" anchor="b"/>
           <a:lstStyle>
             <a:lvl1pPr algn="r">
               <a:defRPr sz="1200"/>
             </a:lvl1pPr>
           </a:lstStyle>
           <a:p>
+            <a:pPr lvl="0">
+              <a:defRPr/>
+            </a:pPr>
             <a:fld id="{CE5E9CC1-C706-0F49-92D6-E571CC5EEA8F}" type="slidenum">
               <a:rPr lang="en-US"/>
+              <a:pPr lvl="0">
+                <a:defRPr/>
+              </a:pPr>
               <a:t>‹#›</a:t>
             </a:fld>
             <a:endParaRPr lang="en-US"/>
@@ -373,13 +417,9 @@
         </p:txBody>
       </p:sp>
     </p:spTree>
-    <p:extLst>
-      <p:ext uri="{BB962C8B-B14F-4D97-AF65-F5344CB8AC3E}">
-        <p14:creationId xmlns:p14="http://schemas.microsoft.com/office/powerpoint/2010/main" val="1024086991"/>
-      </p:ext>
-    </p:extLst>
   </p:cSld>
   <p:clrMap bg1="lt1" tx1="dk1" bg2="lt2" tx2="dk2" accent1="accent1" accent2="accent2" accent3="accent3" accent4="accent4" accent5="accent5" accent6="accent6" hlink="hlink" folHlink="folHlink"/>
+  <p:hf hdr="0" ftr="0" dt="0"/>
   <p:notesStyle>
     <a:lvl1pPr marL="0" algn="l" defTabSz="914400" rtl="0" eaLnBrk="1" latinLnBrk="0" hangingPunct="1">
       <a:defRPr sz="1200" kern="1200">
@@ -476,7 +516,7 @@
 </file>
 
 <file path=ppt/notesSlides/notesSlide1.xml><?xml version="1.0" encoding="utf-8"?>
-<p:notes xmlns:a="http://schemas.openxmlformats.org/drawingml/2006/main" xmlns:r="http://schemas.openxmlformats.org/officeDocument/2006/relationships" xmlns:p="http://schemas.openxmlformats.org/presentationml/2006/main">
+<p:notes xmlns:r="http://schemas.openxmlformats.org/officeDocument/2006/relationships" xmlns:c="http://schemas.openxmlformats.org/drawingml/2006/chart" xmlns:a="http://schemas.openxmlformats.org/drawingml/2006/main" xmlns:dgm="http://schemas.openxmlformats.org/drawingml/2006/diagram" xmlns:dsp="http://schemas.microsoft.com/office/drawing/2008/diagram" xmlns:p="http://schemas.openxmlformats.org/presentationml/2006/main">
   <p:cSld>
     <p:spTree>
       <p:nvGrpSpPr>
@@ -496,10 +536,10 @@
         <p:nvSpPr>
           <p:cNvPr id="2" name="Slide Image Placeholder 1"/>
           <p:cNvSpPr>
-            <a:spLocks noGrp="1" noRot="1" noChangeAspect="1"/>
+            <a:spLocks noGrp="1" noRot="1" noChangeAspect="1" noTextEdit="1"/>
           </p:cNvSpPr>
           <p:nvPr>
-            <p:ph type="sldImg"/>
+            <p:ph type="sldImg" idx="0"/>
           </p:nvPr>
         </p:nvSpPr>
         <p:spPr/>
@@ -519,11 +559,14 @@
           <a:bodyPr/>
           <a:lstStyle/>
           <a:p>
-            <a:r>
-              <a:rPr lang="en-US" dirty="0"/>
+            <a:pPr lvl="0">
+              <a:defRPr/>
+            </a:pPr>
+            <a:r>
+              <a:rPr lang="ko-KR" altLang="en-US"/>
               <a:t/>
             </a:r>
-            <a:endParaRPr lang="en-US" dirty="0"/>
+            <a:endParaRPr lang="ko-KR" altLang="en-US"/>
           </a:p>
         </p:txBody>
       </p:sp>
@@ -542,8 +585,14 @@
           <a:bodyPr/>
           <a:lstStyle/>
           <a:p>
+            <a:pPr lvl="0">
+              <a:defRPr/>
+            </a:pPr>
             <a:fld id="{F7021451-1387-4CA6-816F-3879F97B5CBC}" type="slidenum">
               <a:rPr lang="en-US"/>
+              <a:pPr lvl="0">
+                <a:defRPr/>
+              </a:pPr>
               <a:t>1</a:t>
             </a:fld>
             <a:endParaRPr lang="en-US"/>
@@ -551,11 +600,6 @@
         </p:txBody>
       </p:sp>
     </p:spTree>
-    <p:extLst>
-      <p:ext uri="{BB962C8B-B14F-4D97-AF65-F5344CB8AC3E}">
-        <p14:creationId xmlns:p14="http://schemas.microsoft.com/office/powerpoint/2010/main" val="1024086991"/>
-      </p:ext>
-    </p:extLst>
   </p:cSld>
   <p:clrMapOvr>
     <a:masterClrMapping/>
@@ -564,7 +608,7 @@
 </file>
 
 <file path=ppt/notesSlides/notesSlide10.xml><?xml version="1.0" encoding="utf-8"?>
-<p:notes xmlns:a="http://schemas.openxmlformats.org/drawingml/2006/main" xmlns:r="http://schemas.openxmlformats.org/officeDocument/2006/relationships" xmlns:p="http://schemas.openxmlformats.org/presentationml/2006/main">
+<p:notes xmlns:r="http://schemas.openxmlformats.org/officeDocument/2006/relationships" xmlns:c="http://schemas.openxmlformats.org/drawingml/2006/chart" xmlns:a="http://schemas.openxmlformats.org/drawingml/2006/main" xmlns:dgm="http://schemas.openxmlformats.org/drawingml/2006/diagram" xmlns:dsp="http://schemas.microsoft.com/office/drawing/2008/diagram" xmlns:p="http://schemas.openxmlformats.org/presentationml/2006/main">
   <p:cSld>
     <p:spTree>
       <p:nvGrpSpPr>
@@ -584,10 +628,10 @@
         <p:nvSpPr>
           <p:cNvPr id="2" name="Slide Image Placeholder 1"/>
           <p:cNvSpPr>
-            <a:spLocks noGrp="1" noRot="1" noChangeAspect="1"/>
+            <a:spLocks noGrp="1" noRot="1" noChangeAspect="1" noTextEdit="1"/>
           </p:cNvSpPr>
           <p:nvPr>
-            <p:ph type="sldImg"/>
+            <p:ph type="sldImg" idx="0"/>
           </p:nvPr>
         </p:nvSpPr>
         <p:spPr/>
@@ -607,11 +651,14 @@
           <a:bodyPr/>
           <a:lstStyle/>
           <a:p>
-            <a:r>
-              <a:rPr lang="en-US" dirty="0"/>
+            <a:pPr lvl="0">
+              <a:defRPr/>
+            </a:pPr>
+            <a:r>
+              <a:rPr lang="ko-KR" altLang="en-US"/>
               <a:t/>
             </a:r>
-            <a:endParaRPr lang="en-US" dirty="0"/>
+            <a:endParaRPr lang="ko-KR" altLang="en-US"/>
           </a:p>
         </p:txBody>
       </p:sp>
@@ -630,8 +677,14 @@
           <a:bodyPr/>
           <a:lstStyle/>
           <a:p>
+            <a:pPr lvl="0">
+              <a:defRPr/>
+            </a:pPr>
             <a:fld id="{F7021451-1387-4CA6-816F-3879F97B5CBC}" type="slidenum">
               <a:rPr lang="en-US"/>
+              <a:pPr lvl="0">
+                <a:defRPr/>
+              </a:pPr>
               <a:t>10</a:t>
             </a:fld>
             <a:endParaRPr lang="en-US"/>
@@ -639,11 +692,6 @@
         </p:txBody>
       </p:sp>
     </p:spTree>
-    <p:extLst>
-      <p:ext uri="{BB962C8B-B14F-4D97-AF65-F5344CB8AC3E}">
-        <p14:creationId xmlns:p14="http://schemas.microsoft.com/office/powerpoint/2010/main" val="1024086991"/>
-      </p:ext>
-    </p:extLst>
   </p:cSld>
   <p:clrMapOvr>
     <a:masterClrMapping/>
@@ -652,7 +700,7 @@
 </file>
 
 <file path=ppt/notesSlides/notesSlide11.xml><?xml version="1.0" encoding="utf-8"?>
-<p:notes xmlns:a="http://schemas.openxmlformats.org/drawingml/2006/main" xmlns:r="http://schemas.openxmlformats.org/officeDocument/2006/relationships" xmlns:p="http://schemas.openxmlformats.org/presentationml/2006/main">
+<p:notes xmlns:r="http://schemas.openxmlformats.org/officeDocument/2006/relationships" xmlns:c="http://schemas.openxmlformats.org/drawingml/2006/chart" xmlns:a="http://schemas.openxmlformats.org/drawingml/2006/main" xmlns:dgm="http://schemas.openxmlformats.org/drawingml/2006/diagram" xmlns:dsp="http://schemas.microsoft.com/office/drawing/2008/diagram" xmlns:p="http://schemas.openxmlformats.org/presentationml/2006/main">
   <p:cSld>
     <p:spTree>
       <p:nvGrpSpPr>
@@ -672,10 +720,10 @@
         <p:nvSpPr>
           <p:cNvPr id="2" name="Slide Image Placeholder 1"/>
           <p:cNvSpPr>
-            <a:spLocks noGrp="1" noRot="1" noChangeAspect="1"/>
+            <a:spLocks noGrp="1" noRot="1" noChangeAspect="1" noTextEdit="1"/>
           </p:cNvSpPr>
           <p:nvPr>
-            <p:ph type="sldImg"/>
+            <p:ph type="sldImg" idx="0"/>
           </p:nvPr>
         </p:nvSpPr>
         <p:spPr/>
@@ -695,11 +743,14 @@
           <a:bodyPr/>
           <a:lstStyle/>
           <a:p>
-            <a:r>
-              <a:rPr lang="en-US" dirty="0"/>
+            <a:pPr lvl="0">
+              <a:defRPr/>
+            </a:pPr>
+            <a:r>
+              <a:rPr lang="ko-KR" altLang="en-US"/>
               <a:t/>
             </a:r>
-            <a:endParaRPr lang="en-US" dirty="0"/>
+            <a:endParaRPr lang="ko-KR" altLang="en-US"/>
           </a:p>
         </p:txBody>
       </p:sp>
@@ -718,8 +769,14 @@
           <a:bodyPr/>
           <a:lstStyle/>
           <a:p>
+            <a:pPr lvl="0">
+              <a:defRPr/>
+            </a:pPr>
             <a:fld id="{F7021451-1387-4CA6-816F-3879F97B5CBC}" type="slidenum">
               <a:rPr lang="en-US"/>
+              <a:pPr lvl="0">
+                <a:defRPr/>
+              </a:pPr>
               <a:t>11</a:t>
             </a:fld>
             <a:endParaRPr lang="en-US"/>
@@ -727,11 +784,6 @@
         </p:txBody>
       </p:sp>
     </p:spTree>
-    <p:extLst>
-      <p:ext uri="{BB962C8B-B14F-4D97-AF65-F5344CB8AC3E}">
-        <p14:creationId xmlns:p14="http://schemas.microsoft.com/office/powerpoint/2010/main" val="1024086991"/>
-      </p:ext>
-    </p:extLst>
   </p:cSld>
   <p:clrMapOvr>
     <a:masterClrMapping/>
@@ -740,7 +792,7 @@
 </file>
 
 <file path=ppt/notesSlides/notesSlide12.xml><?xml version="1.0" encoding="utf-8"?>
-<p:notes xmlns:a="http://schemas.openxmlformats.org/drawingml/2006/main" xmlns:r="http://schemas.openxmlformats.org/officeDocument/2006/relationships" xmlns:p="http://schemas.openxmlformats.org/presentationml/2006/main">
+<p:notes xmlns:r="http://schemas.openxmlformats.org/officeDocument/2006/relationships" xmlns:c="http://schemas.openxmlformats.org/drawingml/2006/chart" xmlns:a="http://schemas.openxmlformats.org/drawingml/2006/main" xmlns:dgm="http://schemas.openxmlformats.org/drawingml/2006/diagram" xmlns:dsp="http://schemas.microsoft.com/office/drawing/2008/diagram" xmlns:p="http://schemas.openxmlformats.org/presentationml/2006/main">
   <p:cSld>
     <p:spTree>
       <p:nvGrpSpPr>
@@ -760,10 +812,10 @@
         <p:nvSpPr>
           <p:cNvPr id="2" name="Slide Image Placeholder 1"/>
           <p:cNvSpPr>
-            <a:spLocks noGrp="1" noRot="1" noChangeAspect="1"/>
+            <a:spLocks noGrp="1" noRot="1" noChangeAspect="1" noTextEdit="1"/>
           </p:cNvSpPr>
           <p:nvPr>
-            <p:ph type="sldImg"/>
+            <p:ph type="sldImg" idx="0"/>
           </p:nvPr>
         </p:nvSpPr>
         <p:spPr/>
@@ -783,11 +835,14 @@
           <a:bodyPr/>
           <a:lstStyle/>
           <a:p>
-            <a:r>
-              <a:rPr lang="en-US" dirty="0"/>
+            <a:pPr lvl="0">
+              <a:defRPr/>
+            </a:pPr>
+            <a:r>
+              <a:rPr lang="ko-KR" altLang="en-US"/>
               <a:t/>
             </a:r>
-            <a:endParaRPr lang="en-US" dirty="0"/>
+            <a:endParaRPr lang="ko-KR" altLang="en-US"/>
           </a:p>
         </p:txBody>
       </p:sp>
@@ -806,8 +861,14 @@
           <a:bodyPr/>
           <a:lstStyle/>
           <a:p>
+            <a:pPr lvl="0">
+              <a:defRPr/>
+            </a:pPr>
             <a:fld id="{F7021451-1387-4CA6-816F-3879F97B5CBC}" type="slidenum">
               <a:rPr lang="en-US"/>
+              <a:pPr lvl="0">
+                <a:defRPr/>
+              </a:pPr>
               <a:t>12</a:t>
             </a:fld>
             <a:endParaRPr lang="en-US"/>
@@ -815,11 +876,6 @@
         </p:txBody>
       </p:sp>
     </p:spTree>
-    <p:extLst>
-      <p:ext uri="{BB962C8B-B14F-4D97-AF65-F5344CB8AC3E}">
-        <p14:creationId xmlns:p14="http://schemas.microsoft.com/office/powerpoint/2010/main" val="1024086991"/>
-      </p:ext>
-    </p:extLst>
   </p:cSld>
   <p:clrMapOvr>
     <a:masterClrMapping/>
@@ -828,7 +884,7 @@
 </file>
 
 <file path=ppt/notesSlides/notesSlide13.xml><?xml version="1.0" encoding="utf-8"?>
-<p:notes xmlns:a="http://schemas.openxmlformats.org/drawingml/2006/main" xmlns:r="http://schemas.openxmlformats.org/officeDocument/2006/relationships" xmlns:p="http://schemas.openxmlformats.org/presentationml/2006/main">
+<p:notes xmlns:r="http://schemas.openxmlformats.org/officeDocument/2006/relationships" xmlns:c="http://schemas.openxmlformats.org/drawingml/2006/chart" xmlns:a="http://schemas.openxmlformats.org/drawingml/2006/main" xmlns:dgm="http://schemas.openxmlformats.org/drawingml/2006/diagram" xmlns:dsp="http://schemas.microsoft.com/office/drawing/2008/diagram" xmlns:p="http://schemas.openxmlformats.org/presentationml/2006/main">
   <p:cSld>
     <p:spTree>
       <p:nvGrpSpPr>
@@ -848,10 +904,10 @@
         <p:nvSpPr>
           <p:cNvPr id="2" name="Slide Image Placeholder 1"/>
           <p:cNvSpPr>
-            <a:spLocks noGrp="1" noRot="1" noChangeAspect="1"/>
+            <a:spLocks noGrp="1" noRot="1" noChangeAspect="1" noTextEdit="1"/>
           </p:cNvSpPr>
           <p:nvPr>
-            <p:ph type="sldImg"/>
+            <p:ph type="sldImg" idx="0"/>
           </p:nvPr>
         </p:nvSpPr>
         <p:spPr/>
@@ -871,11 +927,14 @@
           <a:bodyPr/>
           <a:lstStyle/>
           <a:p>
-            <a:r>
-              <a:rPr lang="en-US" dirty="0"/>
+            <a:pPr lvl="0">
+              <a:defRPr/>
+            </a:pPr>
+            <a:r>
+              <a:rPr lang="ko-KR" altLang="en-US"/>
               <a:t/>
             </a:r>
-            <a:endParaRPr lang="en-US" dirty="0"/>
+            <a:endParaRPr lang="ko-KR" altLang="en-US"/>
           </a:p>
         </p:txBody>
       </p:sp>
@@ -894,8 +953,14 @@
           <a:bodyPr/>
           <a:lstStyle/>
           <a:p>
+            <a:pPr lvl="0">
+              <a:defRPr/>
+            </a:pPr>
             <a:fld id="{F7021451-1387-4CA6-816F-3879F97B5CBC}" type="slidenum">
               <a:rPr lang="en-US"/>
+              <a:pPr lvl="0">
+                <a:defRPr/>
+              </a:pPr>
               <a:t>13</a:t>
             </a:fld>
             <a:endParaRPr lang="en-US"/>
@@ -903,11 +968,6 @@
         </p:txBody>
       </p:sp>
     </p:spTree>
-    <p:extLst>
-      <p:ext uri="{BB962C8B-B14F-4D97-AF65-F5344CB8AC3E}">
-        <p14:creationId xmlns:p14="http://schemas.microsoft.com/office/powerpoint/2010/main" val="1024086991"/>
-      </p:ext>
-    </p:extLst>
   </p:cSld>
   <p:clrMapOvr>
     <a:masterClrMapping/>
@@ -916,7 +976,7 @@
 </file>
 
 <file path=ppt/notesSlides/notesSlide14.xml><?xml version="1.0" encoding="utf-8"?>
-<p:notes xmlns:a="http://schemas.openxmlformats.org/drawingml/2006/main" xmlns:r="http://schemas.openxmlformats.org/officeDocument/2006/relationships" xmlns:p="http://schemas.openxmlformats.org/presentationml/2006/main">
+<p:notes xmlns:r="http://schemas.openxmlformats.org/officeDocument/2006/relationships" xmlns:c="http://schemas.openxmlformats.org/drawingml/2006/chart" xmlns:a="http://schemas.openxmlformats.org/drawingml/2006/main" xmlns:dgm="http://schemas.openxmlformats.org/drawingml/2006/diagram" xmlns:dsp="http://schemas.microsoft.com/office/drawing/2008/diagram" xmlns:p="http://schemas.openxmlformats.org/presentationml/2006/main">
   <p:cSld>
     <p:spTree>
       <p:nvGrpSpPr>
@@ -936,10 +996,10 @@
         <p:nvSpPr>
           <p:cNvPr id="2" name="Slide Image Placeholder 1"/>
           <p:cNvSpPr>
-            <a:spLocks noGrp="1" noRot="1" noChangeAspect="1"/>
+            <a:spLocks noGrp="1" noRot="1" noChangeAspect="1" noTextEdit="1"/>
           </p:cNvSpPr>
           <p:nvPr>
-            <p:ph type="sldImg"/>
+            <p:ph type="sldImg" idx="0"/>
           </p:nvPr>
         </p:nvSpPr>
         <p:spPr/>
@@ -959,11 +1019,14 @@
           <a:bodyPr/>
           <a:lstStyle/>
           <a:p>
-            <a:r>
-              <a:rPr lang="en-US" dirty="0"/>
+            <a:pPr lvl="0">
+              <a:defRPr/>
+            </a:pPr>
+            <a:r>
+              <a:rPr lang="ko-KR" altLang="en-US"/>
               <a:t/>
             </a:r>
-            <a:endParaRPr lang="en-US" dirty="0"/>
+            <a:endParaRPr lang="ko-KR" altLang="en-US"/>
           </a:p>
         </p:txBody>
       </p:sp>
@@ -982,8 +1045,14 @@
           <a:bodyPr/>
           <a:lstStyle/>
           <a:p>
+            <a:pPr lvl="0">
+              <a:defRPr/>
+            </a:pPr>
             <a:fld id="{F7021451-1387-4CA6-816F-3879F97B5CBC}" type="slidenum">
               <a:rPr lang="en-US"/>
+              <a:pPr lvl="0">
+                <a:defRPr/>
+              </a:pPr>
               <a:t>14</a:t>
             </a:fld>
             <a:endParaRPr lang="en-US"/>
@@ -991,11 +1060,6 @@
         </p:txBody>
       </p:sp>
     </p:spTree>
-    <p:extLst>
-      <p:ext uri="{BB962C8B-B14F-4D97-AF65-F5344CB8AC3E}">
-        <p14:creationId xmlns:p14="http://schemas.microsoft.com/office/powerpoint/2010/main" val="1024086991"/>
-      </p:ext>
-    </p:extLst>
   </p:cSld>
   <p:clrMapOvr>
     <a:masterClrMapping/>
@@ -1004,7 +1068,7 @@
 </file>
 
 <file path=ppt/notesSlides/notesSlide15.xml><?xml version="1.0" encoding="utf-8"?>
-<p:notes xmlns:a="http://schemas.openxmlformats.org/drawingml/2006/main" xmlns:r="http://schemas.openxmlformats.org/officeDocument/2006/relationships" xmlns:p="http://schemas.openxmlformats.org/presentationml/2006/main">
+<p:notes xmlns:r="http://schemas.openxmlformats.org/officeDocument/2006/relationships" xmlns:c="http://schemas.openxmlformats.org/drawingml/2006/chart" xmlns:a="http://schemas.openxmlformats.org/drawingml/2006/main" xmlns:dgm="http://schemas.openxmlformats.org/drawingml/2006/diagram" xmlns:dsp="http://schemas.microsoft.com/office/drawing/2008/diagram" xmlns:p="http://schemas.openxmlformats.org/presentationml/2006/main">
   <p:cSld>
     <p:spTree>
       <p:nvGrpSpPr>
@@ -1024,10 +1088,10 @@
         <p:nvSpPr>
           <p:cNvPr id="2" name="Slide Image Placeholder 1"/>
           <p:cNvSpPr>
-            <a:spLocks noGrp="1" noRot="1" noChangeAspect="1"/>
+            <a:spLocks noGrp="1" noRot="1" noChangeAspect="1" noTextEdit="1"/>
           </p:cNvSpPr>
           <p:nvPr>
-            <p:ph type="sldImg"/>
+            <p:ph type="sldImg" idx="0"/>
           </p:nvPr>
         </p:nvSpPr>
         <p:spPr/>
@@ -1047,11 +1111,14 @@
           <a:bodyPr/>
           <a:lstStyle/>
           <a:p>
-            <a:r>
-              <a:rPr lang="en-US" dirty="0"/>
+            <a:pPr lvl="0">
+              <a:defRPr/>
+            </a:pPr>
+            <a:r>
+              <a:rPr lang="ko-KR" altLang="en-US"/>
               <a:t/>
             </a:r>
-            <a:endParaRPr lang="en-US" dirty="0"/>
+            <a:endParaRPr lang="ko-KR" altLang="en-US"/>
           </a:p>
         </p:txBody>
       </p:sp>
@@ -1070,8 +1137,14 @@
           <a:bodyPr/>
           <a:lstStyle/>
           <a:p>
+            <a:pPr lvl="0">
+              <a:defRPr/>
+            </a:pPr>
             <a:fld id="{F7021451-1387-4CA6-816F-3879F97B5CBC}" type="slidenum">
               <a:rPr lang="en-US"/>
+              <a:pPr lvl="0">
+                <a:defRPr/>
+              </a:pPr>
               <a:t>15</a:t>
             </a:fld>
             <a:endParaRPr lang="en-US"/>
@@ -1079,11 +1152,6 @@
         </p:txBody>
       </p:sp>
     </p:spTree>
-    <p:extLst>
-      <p:ext uri="{BB962C8B-B14F-4D97-AF65-F5344CB8AC3E}">
-        <p14:creationId xmlns:p14="http://schemas.microsoft.com/office/powerpoint/2010/main" val="1024086991"/>
-      </p:ext>
-    </p:extLst>
   </p:cSld>
   <p:clrMapOvr>
     <a:masterClrMapping/>
@@ -1092,7 +1160,7 @@
 </file>
 
 <file path=ppt/notesSlides/notesSlide16.xml><?xml version="1.0" encoding="utf-8"?>
-<p:notes xmlns:a="http://schemas.openxmlformats.org/drawingml/2006/main" xmlns:r="http://schemas.openxmlformats.org/officeDocument/2006/relationships" xmlns:p="http://schemas.openxmlformats.org/presentationml/2006/main">
+<p:notes xmlns:r="http://schemas.openxmlformats.org/officeDocument/2006/relationships" xmlns:c="http://schemas.openxmlformats.org/drawingml/2006/chart" xmlns:a="http://schemas.openxmlformats.org/drawingml/2006/main" xmlns:dgm="http://schemas.openxmlformats.org/drawingml/2006/diagram" xmlns:dsp="http://schemas.microsoft.com/office/drawing/2008/diagram" xmlns:p="http://schemas.openxmlformats.org/presentationml/2006/main">
   <p:cSld>
     <p:spTree>
       <p:nvGrpSpPr>
@@ -1112,10 +1180,10 @@
         <p:nvSpPr>
           <p:cNvPr id="2" name="Slide Image Placeholder 1"/>
           <p:cNvSpPr>
-            <a:spLocks noGrp="1" noRot="1" noChangeAspect="1"/>
+            <a:spLocks noGrp="1" noRot="1" noChangeAspect="1" noTextEdit="1"/>
           </p:cNvSpPr>
           <p:nvPr>
-            <p:ph type="sldImg"/>
+            <p:ph type="sldImg" idx="0"/>
           </p:nvPr>
         </p:nvSpPr>
         <p:spPr/>
@@ -1135,11 +1203,14 @@
           <a:bodyPr/>
           <a:lstStyle/>
           <a:p>
-            <a:r>
-              <a:rPr lang="en-US" dirty="0"/>
+            <a:pPr lvl="0">
+              <a:defRPr/>
+            </a:pPr>
+            <a:r>
+              <a:rPr lang="ko-KR" altLang="en-US"/>
               <a:t/>
             </a:r>
-            <a:endParaRPr lang="en-US" dirty="0"/>
+            <a:endParaRPr lang="ko-KR" altLang="en-US"/>
           </a:p>
         </p:txBody>
       </p:sp>
@@ -1158,8 +1229,14 @@
           <a:bodyPr/>
           <a:lstStyle/>
           <a:p>
+            <a:pPr lvl="0">
+              <a:defRPr/>
+            </a:pPr>
             <a:fld id="{F7021451-1387-4CA6-816F-3879F97B5CBC}" type="slidenum">
               <a:rPr lang="en-US"/>
+              <a:pPr lvl="0">
+                <a:defRPr/>
+              </a:pPr>
               <a:t>16</a:t>
             </a:fld>
             <a:endParaRPr lang="en-US"/>
@@ -1167,11 +1244,6 @@
         </p:txBody>
       </p:sp>
     </p:spTree>
-    <p:extLst>
-      <p:ext uri="{BB962C8B-B14F-4D97-AF65-F5344CB8AC3E}">
-        <p14:creationId xmlns:p14="http://schemas.microsoft.com/office/powerpoint/2010/main" val="1024086991"/>
-      </p:ext>
-    </p:extLst>
   </p:cSld>
   <p:clrMapOvr>
     <a:masterClrMapping/>
@@ -1180,7 +1252,7 @@
 </file>
 
 <file path=ppt/notesSlides/notesSlide17.xml><?xml version="1.0" encoding="utf-8"?>
-<p:notes xmlns:a="http://schemas.openxmlformats.org/drawingml/2006/main" xmlns:r="http://schemas.openxmlformats.org/officeDocument/2006/relationships" xmlns:p="http://schemas.openxmlformats.org/presentationml/2006/main">
+<p:notes xmlns:r="http://schemas.openxmlformats.org/officeDocument/2006/relationships" xmlns:c="http://schemas.openxmlformats.org/drawingml/2006/chart" xmlns:a="http://schemas.openxmlformats.org/drawingml/2006/main" xmlns:dgm="http://schemas.openxmlformats.org/drawingml/2006/diagram" xmlns:dsp="http://schemas.microsoft.com/office/drawing/2008/diagram" xmlns:p="http://schemas.openxmlformats.org/presentationml/2006/main">
   <p:cSld>
     <p:spTree>
       <p:nvGrpSpPr>
@@ -1200,10 +1272,10 @@
         <p:nvSpPr>
           <p:cNvPr id="2" name="Slide Image Placeholder 1"/>
           <p:cNvSpPr>
-            <a:spLocks noGrp="1" noRot="1" noChangeAspect="1"/>
+            <a:spLocks noGrp="1" noRot="1" noChangeAspect="1" noTextEdit="1"/>
           </p:cNvSpPr>
           <p:nvPr>
-            <p:ph type="sldImg"/>
+            <p:ph type="sldImg" idx="0"/>
           </p:nvPr>
         </p:nvSpPr>
         <p:spPr/>
@@ -1223,11 +1295,14 @@
           <a:bodyPr/>
           <a:lstStyle/>
           <a:p>
-            <a:r>
-              <a:rPr lang="en-US" dirty="0"/>
+            <a:pPr lvl="0">
+              <a:defRPr/>
+            </a:pPr>
+            <a:r>
+              <a:rPr lang="ko-KR" altLang="en-US"/>
               <a:t/>
             </a:r>
-            <a:endParaRPr lang="en-US" dirty="0"/>
+            <a:endParaRPr lang="ko-KR" altLang="en-US"/>
           </a:p>
         </p:txBody>
       </p:sp>
@@ -1246,8 +1321,14 @@
           <a:bodyPr/>
           <a:lstStyle/>
           <a:p>
+            <a:pPr lvl="0">
+              <a:defRPr/>
+            </a:pPr>
             <a:fld id="{F7021451-1387-4CA6-816F-3879F97B5CBC}" type="slidenum">
               <a:rPr lang="en-US"/>
+              <a:pPr lvl="0">
+                <a:defRPr/>
+              </a:pPr>
               <a:t>17</a:t>
             </a:fld>
             <a:endParaRPr lang="en-US"/>
@@ -1255,11 +1336,6 @@
         </p:txBody>
       </p:sp>
     </p:spTree>
-    <p:extLst>
-      <p:ext uri="{BB962C8B-B14F-4D97-AF65-F5344CB8AC3E}">
-        <p14:creationId xmlns:p14="http://schemas.microsoft.com/office/powerpoint/2010/main" val="1024086991"/>
-      </p:ext>
-    </p:extLst>
   </p:cSld>
   <p:clrMapOvr>
     <a:masterClrMapping/>
@@ -1268,7 +1344,7 @@
 </file>
 
 <file path=ppt/notesSlides/notesSlide18.xml><?xml version="1.0" encoding="utf-8"?>
-<p:notes xmlns:a="http://schemas.openxmlformats.org/drawingml/2006/main" xmlns:r="http://schemas.openxmlformats.org/officeDocument/2006/relationships" xmlns:p="http://schemas.openxmlformats.org/presentationml/2006/main">
+<p:notes xmlns:r="http://schemas.openxmlformats.org/officeDocument/2006/relationships" xmlns:c="http://schemas.openxmlformats.org/drawingml/2006/chart" xmlns:a="http://schemas.openxmlformats.org/drawingml/2006/main" xmlns:dgm="http://schemas.openxmlformats.org/drawingml/2006/diagram" xmlns:dsp="http://schemas.microsoft.com/office/drawing/2008/diagram" xmlns:p="http://schemas.openxmlformats.org/presentationml/2006/main">
   <p:cSld>
     <p:spTree>
       <p:nvGrpSpPr>
@@ -1288,10 +1364,10 @@
         <p:nvSpPr>
           <p:cNvPr id="2" name="Slide Image Placeholder 1"/>
           <p:cNvSpPr>
-            <a:spLocks noGrp="1" noRot="1" noChangeAspect="1"/>
+            <a:spLocks noGrp="1" noRot="1" noChangeAspect="1" noTextEdit="1"/>
           </p:cNvSpPr>
           <p:nvPr>
-            <p:ph type="sldImg"/>
+            <p:ph type="sldImg" idx="0"/>
           </p:nvPr>
         </p:nvSpPr>
         <p:spPr/>
@@ -1311,11 +1387,14 @@
           <a:bodyPr/>
           <a:lstStyle/>
           <a:p>
-            <a:r>
-              <a:rPr lang="en-US" dirty="0"/>
+            <a:pPr lvl="0">
+              <a:defRPr/>
+            </a:pPr>
+            <a:r>
+              <a:rPr lang="ko-KR" altLang="en-US"/>
               <a:t/>
             </a:r>
-            <a:endParaRPr lang="en-US" dirty="0"/>
+            <a:endParaRPr lang="ko-KR" altLang="en-US"/>
           </a:p>
         </p:txBody>
       </p:sp>
@@ -1334,8 +1413,14 @@
           <a:bodyPr/>
           <a:lstStyle/>
           <a:p>
+            <a:pPr lvl="0">
+              <a:defRPr/>
+            </a:pPr>
             <a:fld id="{F7021451-1387-4CA6-816F-3879F97B5CBC}" type="slidenum">
               <a:rPr lang="en-US"/>
+              <a:pPr lvl="0">
+                <a:defRPr/>
+              </a:pPr>
               <a:t>18</a:t>
             </a:fld>
             <a:endParaRPr lang="en-US"/>
@@ -1343,11 +1428,6 @@
         </p:txBody>
       </p:sp>
     </p:spTree>
-    <p:extLst>
-      <p:ext uri="{BB962C8B-B14F-4D97-AF65-F5344CB8AC3E}">
-        <p14:creationId xmlns:p14="http://schemas.microsoft.com/office/powerpoint/2010/main" val="1024086991"/>
-      </p:ext>
-    </p:extLst>
   </p:cSld>
   <p:clrMapOvr>
     <a:masterClrMapping/>
@@ -1356,7 +1436,7 @@
 </file>
 
 <file path=ppt/notesSlides/notesSlide2.xml><?xml version="1.0" encoding="utf-8"?>
-<p:notes xmlns:a="http://schemas.openxmlformats.org/drawingml/2006/main" xmlns:r="http://schemas.openxmlformats.org/officeDocument/2006/relationships" xmlns:p="http://schemas.openxmlformats.org/presentationml/2006/main">
+<p:notes xmlns:r="http://schemas.openxmlformats.org/officeDocument/2006/relationships" xmlns:c="http://schemas.openxmlformats.org/drawingml/2006/chart" xmlns:a="http://schemas.openxmlformats.org/drawingml/2006/main" xmlns:dgm="http://schemas.openxmlformats.org/drawingml/2006/diagram" xmlns:dsp="http://schemas.microsoft.com/office/drawing/2008/diagram" xmlns:p="http://schemas.openxmlformats.org/presentationml/2006/main">
   <p:cSld>
     <p:spTree>
       <p:nvGrpSpPr>
@@ -1376,10 +1456,10 @@
         <p:nvSpPr>
           <p:cNvPr id="2" name="Slide Image Placeholder 1"/>
           <p:cNvSpPr>
-            <a:spLocks noGrp="1" noRot="1" noChangeAspect="1"/>
+            <a:spLocks noGrp="1" noRot="1" noChangeAspect="1" noTextEdit="1"/>
           </p:cNvSpPr>
           <p:nvPr>
-            <p:ph type="sldImg"/>
+            <p:ph type="sldImg" idx="0"/>
           </p:nvPr>
         </p:nvSpPr>
         <p:spPr/>
@@ -1399,11 +1479,14 @@
           <a:bodyPr/>
           <a:lstStyle/>
           <a:p>
-            <a:r>
-              <a:rPr lang="en-US" dirty="0"/>
+            <a:pPr lvl="0">
+              <a:defRPr/>
+            </a:pPr>
+            <a:r>
+              <a:rPr lang="ko-KR" altLang="en-US"/>
               <a:t/>
             </a:r>
-            <a:endParaRPr lang="en-US" dirty="0"/>
+            <a:endParaRPr lang="ko-KR" altLang="en-US"/>
           </a:p>
         </p:txBody>
       </p:sp>
@@ -1422,8 +1505,14 @@
           <a:bodyPr/>
           <a:lstStyle/>
           <a:p>
+            <a:pPr lvl="0">
+              <a:defRPr/>
+            </a:pPr>
             <a:fld id="{F7021451-1387-4CA6-816F-3879F97B5CBC}" type="slidenum">
               <a:rPr lang="en-US"/>
+              <a:pPr lvl="0">
+                <a:defRPr/>
+              </a:pPr>
               <a:t>2</a:t>
             </a:fld>
             <a:endParaRPr lang="en-US"/>
@@ -1431,11 +1520,6 @@
         </p:txBody>
       </p:sp>
     </p:spTree>
-    <p:extLst>
-      <p:ext uri="{BB962C8B-B14F-4D97-AF65-F5344CB8AC3E}">
-        <p14:creationId xmlns:p14="http://schemas.microsoft.com/office/powerpoint/2010/main" val="1024086991"/>
-      </p:ext>
-    </p:extLst>
   </p:cSld>
   <p:clrMapOvr>
     <a:masterClrMapping/>
@@ -1444,7 +1528,7 @@
 </file>
 
 <file path=ppt/notesSlides/notesSlide3.xml><?xml version="1.0" encoding="utf-8"?>
-<p:notes xmlns:a="http://schemas.openxmlformats.org/drawingml/2006/main" xmlns:r="http://schemas.openxmlformats.org/officeDocument/2006/relationships" xmlns:p="http://schemas.openxmlformats.org/presentationml/2006/main">
+<p:notes xmlns:r="http://schemas.openxmlformats.org/officeDocument/2006/relationships" xmlns:c="http://schemas.openxmlformats.org/drawingml/2006/chart" xmlns:a="http://schemas.openxmlformats.org/drawingml/2006/main" xmlns:dgm="http://schemas.openxmlformats.org/drawingml/2006/diagram" xmlns:dsp="http://schemas.microsoft.com/office/drawing/2008/diagram" xmlns:p="http://schemas.openxmlformats.org/presentationml/2006/main">
   <p:cSld>
     <p:spTree>
       <p:nvGrpSpPr>
@@ -1464,10 +1548,10 @@
         <p:nvSpPr>
           <p:cNvPr id="2" name="Slide Image Placeholder 1"/>
           <p:cNvSpPr>
-            <a:spLocks noGrp="1" noRot="1" noChangeAspect="1"/>
+            <a:spLocks noGrp="1" noRot="1" noChangeAspect="1" noTextEdit="1"/>
           </p:cNvSpPr>
           <p:nvPr>
-            <p:ph type="sldImg"/>
+            <p:ph type="sldImg" idx="0"/>
           </p:nvPr>
         </p:nvSpPr>
         <p:spPr/>
@@ -1487,11 +1571,14 @@
           <a:bodyPr/>
           <a:lstStyle/>
           <a:p>
-            <a:r>
-              <a:rPr lang="en-US" dirty="0"/>
+            <a:pPr lvl="0">
+              <a:defRPr/>
+            </a:pPr>
+            <a:r>
+              <a:rPr lang="ko-KR" altLang="en-US"/>
               <a:t/>
             </a:r>
-            <a:endParaRPr lang="en-US" dirty="0"/>
+            <a:endParaRPr lang="ko-KR" altLang="en-US"/>
           </a:p>
         </p:txBody>
       </p:sp>
@@ -1510,8 +1597,14 @@
           <a:bodyPr/>
           <a:lstStyle/>
           <a:p>
+            <a:pPr lvl="0">
+              <a:defRPr/>
+            </a:pPr>
             <a:fld id="{F7021451-1387-4CA6-816F-3879F97B5CBC}" type="slidenum">
               <a:rPr lang="en-US"/>
+              <a:pPr lvl="0">
+                <a:defRPr/>
+              </a:pPr>
               <a:t>3</a:t>
             </a:fld>
             <a:endParaRPr lang="en-US"/>
@@ -1519,11 +1612,6 @@
         </p:txBody>
       </p:sp>
     </p:spTree>
-    <p:extLst>
-      <p:ext uri="{BB962C8B-B14F-4D97-AF65-F5344CB8AC3E}">
-        <p14:creationId xmlns:p14="http://schemas.microsoft.com/office/powerpoint/2010/main" val="1024086991"/>
-      </p:ext>
-    </p:extLst>
   </p:cSld>
   <p:clrMapOvr>
     <a:masterClrMapping/>
@@ -1532,7 +1620,7 @@
 </file>
 
 <file path=ppt/notesSlides/notesSlide4.xml><?xml version="1.0" encoding="utf-8"?>
-<p:notes xmlns:a="http://schemas.openxmlformats.org/drawingml/2006/main" xmlns:r="http://schemas.openxmlformats.org/officeDocument/2006/relationships" xmlns:p="http://schemas.openxmlformats.org/presentationml/2006/main">
+<p:notes xmlns:r="http://schemas.openxmlformats.org/officeDocument/2006/relationships" xmlns:c="http://schemas.openxmlformats.org/drawingml/2006/chart" xmlns:a="http://schemas.openxmlformats.org/drawingml/2006/main" xmlns:dgm="http://schemas.openxmlformats.org/drawingml/2006/diagram" xmlns:dsp="http://schemas.microsoft.com/office/drawing/2008/diagram" xmlns:p="http://schemas.openxmlformats.org/presentationml/2006/main">
   <p:cSld>
     <p:spTree>
       <p:nvGrpSpPr>
@@ -1552,10 +1640,10 @@
         <p:nvSpPr>
           <p:cNvPr id="2" name="Slide Image Placeholder 1"/>
           <p:cNvSpPr>
-            <a:spLocks noGrp="1" noRot="1" noChangeAspect="1"/>
+            <a:spLocks noGrp="1" noRot="1" noChangeAspect="1" noTextEdit="1"/>
           </p:cNvSpPr>
           <p:nvPr>
-            <p:ph type="sldImg"/>
+            <p:ph type="sldImg" idx="0"/>
           </p:nvPr>
         </p:nvSpPr>
         <p:spPr/>
@@ -1575,11 +1663,14 @@
           <a:bodyPr/>
           <a:lstStyle/>
           <a:p>
-            <a:r>
-              <a:rPr lang="en-US" dirty="0"/>
+            <a:pPr lvl="0">
+              <a:defRPr/>
+            </a:pPr>
+            <a:r>
+              <a:rPr lang="ko-KR" altLang="en-US"/>
               <a:t/>
             </a:r>
-            <a:endParaRPr lang="en-US" dirty="0"/>
+            <a:endParaRPr lang="ko-KR" altLang="en-US"/>
           </a:p>
         </p:txBody>
       </p:sp>
@@ -1598,8 +1689,14 @@
           <a:bodyPr/>
           <a:lstStyle/>
           <a:p>
+            <a:pPr lvl="0">
+              <a:defRPr/>
+            </a:pPr>
             <a:fld id="{F7021451-1387-4CA6-816F-3879F97B5CBC}" type="slidenum">
               <a:rPr lang="en-US"/>
+              <a:pPr lvl="0">
+                <a:defRPr/>
+              </a:pPr>
               <a:t>4</a:t>
             </a:fld>
             <a:endParaRPr lang="en-US"/>
@@ -1607,11 +1704,6 @@
         </p:txBody>
       </p:sp>
     </p:spTree>
-    <p:extLst>
-      <p:ext uri="{BB962C8B-B14F-4D97-AF65-F5344CB8AC3E}">
-        <p14:creationId xmlns:p14="http://schemas.microsoft.com/office/powerpoint/2010/main" val="1024086991"/>
-      </p:ext>
-    </p:extLst>
   </p:cSld>
   <p:clrMapOvr>
     <a:masterClrMapping/>
@@ -1620,7 +1712,7 @@
 </file>
 
 <file path=ppt/notesSlides/notesSlide5.xml><?xml version="1.0" encoding="utf-8"?>
-<p:notes xmlns:a="http://schemas.openxmlformats.org/drawingml/2006/main" xmlns:r="http://schemas.openxmlformats.org/officeDocument/2006/relationships" xmlns:p="http://schemas.openxmlformats.org/presentationml/2006/main">
+<p:notes xmlns:r="http://schemas.openxmlformats.org/officeDocument/2006/relationships" xmlns:c="http://schemas.openxmlformats.org/drawingml/2006/chart" xmlns:a="http://schemas.openxmlformats.org/drawingml/2006/main" xmlns:dgm="http://schemas.openxmlformats.org/drawingml/2006/diagram" xmlns:dsp="http://schemas.microsoft.com/office/drawing/2008/diagram" xmlns:p="http://schemas.openxmlformats.org/presentationml/2006/main">
   <p:cSld>
     <p:spTree>
       <p:nvGrpSpPr>
@@ -1640,10 +1732,10 @@
         <p:nvSpPr>
           <p:cNvPr id="2" name="Slide Image Placeholder 1"/>
           <p:cNvSpPr>
-            <a:spLocks noGrp="1" noRot="1" noChangeAspect="1"/>
+            <a:spLocks noGrp="1" noRot="1" noChangeAspect="1" noTextEdit="1"/>
           </p:cNvSpPr>
           <p:nvPr>
-            <p:ph type="sldImg"/>
+            <p:ph type="sldImg" idx="0"/>
           </p:nvPr>
         </p:nvSpPr>
         <p:spPr/>
@@ -1663,11 +1755,14 @@
           <a:bodyPr/>
           <a:lstStyle/>
           <a:p>
-            <a:r>
-              <a:rPr lang="en-US" dirty="0"/>
+            <a:pPr lvl="0">
+              <a:defRPr/>
+            </a:pPr>
+            <a:r>
+              <a:rPr lang="ko-KR" altLang="en-US"/>
               <a:t/>
             </a:r>
-            <a:endParaRPr lang="en-US" dirty="0"/>
+            <a:endParaRPr lang="ko-KR" altLang="en-US"/>
           </a:p>
         </p:txBody>
       </p:sp>
@@ -1686,8 +1781,14 @@
           <a:bodyPr/>
           <a:lstStyle/>
           <a:p>
+            <a:pPr lvl="0">
+              <a:defRPr/>
+            </a:pPr>
             <a:fld id="{F7021451-1387-4CA6-816F-3879F97B5CBC}" type="slidenum">
               <a:rPr lang="en-US"/>
+              <a:pPr lvl="0">
+                <a:defRPr/>
+              </a:pPr>
               <a:t>5</a:t>
             </a:fld>
             <a:endParaRPr lang="en-US"/>
@@ -1695,11 +1796,6 @@
         </p:txBody>
       </p:sp>
     </p:spTree>
-    <p:extLst>
-      <p:ext uri="{BB962C8B-B14F-4D97-AF65-F5344CB8AC3E}">
-        <p14:creationId xmlns:p14="http://schemas.microsoft.com/office/powerpoint/2010/main" val="1024086991"/>
-      </p:ext>
-    </p:extLst>
   </p:cSld>
   <p:clrMapOvr>
     <a:masterClrMapping/>
@@ -1708,7 +1804,7 @@
 </file>
 
 <file path=ppt/notesSlides/notesSlide6.xml><?xml version="1.0" encoding="utf-8"?>
-<p:notes xmlns:a="http://schemas.openxmlformats.org/drawingml/2006/main" xmlns:r="http://schemas.openxmlformats.org/officeDocument/2006/relationships" xmlns:p="http://schemas.openxmlformats.org/presentationml/2006/main">
+<p:notes xmlns:r="http://schemas.openxmlformats.org/officeDocument/2006/relationships" xmlns:c="http://schemas.openxmlformats.org/drawingml/2006/chart" xmlns:a="http://schemas.openxmlformats.org/drawingml/2006/main" xmlns:dgm="http://schemas.openxmlformats.org/drawingml/2006/diagram" xmlns:dsp="http://schemas.microsoft.com/office/drawing/2008/diagram" xmlns:p="http://schemas.openxmlformats.org/presentationml/2006/main">
   <p:cSld>
     <p:spTree>
       <p:nvGrpSpPr>
@@ -1728,10 +1824,10 @@
         <p:nvSpPr>
           <p:cNvPr id="2" name="Slide Image Placeholder 1"/>
           <p:cNvSpPr>
-            <a:spLocks noGrp="1" noRot="1" noChangeAspect="1"/>
+            <a:spLocks noGrp="1" noRot="1" noChangeAspect="1" noTextEdit="1"/>
           </p:cNvSpPr>
           <p:nvPr>
-            <p:ph type="sldImg"/>
+            <p:ph type="sldImg" idx="0"/>
           </p:nvPr>
         </p:nvSpPr>
         <p:spPr/>
@@ -1751,11 +1847,14 @@
           <a:bodyPr/>
           <a:lstStyle/>
           <a:p>
-            <a:r>
-              <a:rPr lang="en-US" dirty="0"/>
+            <a:pPr lvl="0">
+              <a:defRPr/>
+            </a:pPr>
+            <a:r>
+              <a:rPr lang="ko-KR" altLang="en-US"/>
               <a:t/>
             </a:r>
-            <a:endParaRPr lang="en-US" dirty="0"/>
+            <a:endParaRPr lang="ko-KR" altLang="en-US"/>
           </a:p>
         </p:txBody>
       </p:sp>
@@ -1774,8 +1873,14 @@
           <a:bodyPr/>
           <a:lstStyle/>
           <a:p>
+            <a:pPr lvl="0">
+              <a:defRPr/>
+            </a:pPr>
             <a:fld id="{F7021451-1387-4CA6-816F-3879F97B5CBC}" type="slidenum">
               <a:rPr lang="en-US"/>
+              <a:pPr lvl="0">
+                <a:defRPr/>
+              </a:pPr>
               <a:t>6</a:t>
             </a:fld>
             <a:endParaRPr lang="en-US"/>
@@ -1783,11 +1888,6 @@
         </p:txBody>
       </p:sp>
     </p:spTree>
-    <p:extLst>
-      <p:ext uri="{BB962C8B-B14F-4D97-AF65-F5344CB8AC3E}">
-        <p14:creationId xmlns:p14="http://schemas.microsoft.com/office/powerpoint/2010/main" val="1024086991"/>
-      </p:ext>
-    </p:extLst>
   </p:cSld>
   <p:clrMapOvr>
     <a:masterClrMapping/>
@@ -1796,7 +1896,7 @@
 </file>
 
 <file path=ppt/notesSlides/notesSlide7.xml><?xml version="1.0" encoding="utf-8"?>
-<p:notes xmlns:a="http://schemas.openxmlformats.org/drawingml/2006/main" xmlns:r="http://schemas.openxmlformats.org/officeDocument/2006/relationships" xmlns:p="http://schemas.openxmlformats.org/presentationml/2006/main">
+<p:notes xmlns:r="http://schemas.openxmlformats.org/officeDocument/2006/relationships" xmlns:c="http://schemas.openxmlformats.org/drawingml/2006/chart" xmlns:a="http://schemas.openxmlformats.org/drawingml/2006/main" xmlns:dgm="http://schemas.openxmlformats.org/drawingml/2006/diagram" xmlns:dsp="http://schemas.microsoft.com/office/drawing/2008/diagram" xmlns:p="http://schemas.openxmlformats.org/presentationml/2006/main">
   <p:cSld>
     <p:spTree>
       <p:nvGrpSpPr>
@@ -1816,10 +1916,10 @@
         <p:nvSpPr>
           <p:cNvPr id="2" name="Slide Image Placeholder 1"/>
           <p:cNvSpPr>
-            <a:spLocks noGrp="1" noRot="1" noChangeAspect="1"/>
+            <a:spLocks noGrp="1" noRot="1" noChangeAspect="1" noTextEdit="1"/>
           </p:cNvSpPr>
           <p:nvPr>
-            <p:ph type="sldImg"/>
+            <p:ph type="sldImg" idx="0"/>
           </p:nvPr>
         </p:nvSpPr>
         <p:spPr/>
@@ -1839,11 +1939,14 @@
           <a:bodyPr/>
           <a:lstStyle/>
           <a:p>
-            <a:r>
-              <a:rPr lang="en-US" dirty="0"/>
+            <a:pPr lvl="0">
+              <a:defRPr/>
+            </a:pPr>
+            <a:r>
+              <a:rPr lang="ko-KR" altLang="en-US"/>
               <a:t/>
             </a:r>
-            <a:endParaRPr lang="en-US" dirty="0"/>
+            <a:endParaRPr lang="ko-KR" altLang="en-US"/>
           </a:p>
         </p:txBody>
       </p:sp>
@@ -1862,8 +1965,14 @@
           <a:bodyPr/>
           <a:lstStyle/>
           <a:p>
+            <a:pPr lvl="0">
+              <a:defRPr/>
+            </a:pPr>
             <a:fld id="{F7021451-1387-4CA6-816F-3879F97B5CBC}" type="slidenum">
               <a:rPr lang="en-US"/>
+              <a:pPr lvl="0">
+                <a:defRPr/>
+              </a:pPr>
               <a:t>7</a:t>
             </a:fld>
             <a:endParaRPr lang="en-US"/>
@@ -1871,11 +1980,6 @@
         </p:txBody>
       </p:sp>
     </p:spTree>
-    <p:extLst>
-      <p:ext uri="{BB962C8B-B14F-4D97-AF65-F5344CB8AC3E}">
-        <p14:creationId xmlns:p14="http://schemas.microsoft.com/office/powerpoint/2010/main" val="1024086991"/>
-      </p:ext>
-    </p:extLst>
   </p:cSld>
   <p:clrMapOvr>
     <a:masterClrMapping/>
@@ -1884,7 +1988,7 @@
 </file>
 
 <file path=ppt/notesSlides/notesSlide8.xml><?xml version="1.0" encoding="utf-8"?>
-<p:notes xmlns:a="http://schemas.openxmlformats.org/drawingml/2006/main" xmlns:r="http://schemas.openxmlformats.org/officeDocument/2006/relationships" xmlns:p="http://schemas.openxmlformats.org/presentationml/2006/main">
+<p:notes xmlns:r="http://schemas.openxmlformats.org/officeDocument/2006/relationships" xmlns:c="http://schemas.openxmlformats.org/drawingml/2006/chart" xmlns:a="http://schemas.openxmlformats.org/drawingml/2006/main" xmlns:dgm="http://schemas.openxmlformats.org/drawingml/2006/diagram" xmlns:dsp="http://schemas.microsoft.com/office/drawing/2008/diagram" xmlns:p="http://schemas.openxmlformats.org/presentationml/2006/main">
   <p:cSld>
     <p:spTree>
       <p:nvGrpSpPr>
@@ -1904,10 +2008,10 @@
         <p:nvSpPr>
           <p:cNvPr id="2" name="Slide Image Placeholder 1"/>
           <p:cNvSpPr>
-            <a:spLocks noGrp="1" noRot="1" noChangeAspect="1"/>
+            <a:spLocks noGrp="1" noRot="1" noChangeAspect="1" noTextEdit="1"/>
           </p:cNvSpPr>
           <p:nvPr>
-            <p:ph type="sldImg"/>
+            <p:ph type="sldImg" idx="0"/>
           </p:nvPr>
         </p:nvSpPr>
         <p:spPr/>
@@ -1927,11 +2031,14 @@
           <a:bodyPr/>
           <a:lstStyle/>
           <a:p>
-            <a:r>
-              <a:rPr lang="en-US" dirty="0"/>
+            <a:pPr lvl="0">
+              <a:defRPr/>
+            </a:pPr>
+            <a:r>
+              <a:rPr lang="ko-KR" altLang="en-US"/>
               <a:t/>
             </a:r>
-            <a:endParaRPr lang="en-US" dirty="0"/>
+            <a:endParaRPr lang="ko-KR" altLang="en-US"/>
           </a:p>
         </p:txBody>
       </p:sp>
@@ -1950,8 +2057,14 @@
           <a:bodyPr/>
           <a:lstStyle/>
           <a:p>
+            <a:pPr lvl="0">
+              <a:defRPr/>
+            </a:pPr>
             <a:fld id="{F7021451-1387-4CA6-816F-3879F97B5CBC}" type="slidenum">
               <a:rPr lang="en-US"/>
+              <a:pPr lvl="0">
+                <a:defRPr/>
+              </a:pPr>
               <a:t>8</a:t>
             </a:fld>
             <a:endParaRPr lang="en-US"/>
@@ -1959,11 +2072,6 @@
         </p:txBody>
       </p:sp>
     </p:spTree>
-    <p:extLst>
-      <p:ext uri="{BB962C8B-B14F-4D97-AF65-F5344CB8AC3E}">
-        <p14:creationId xmlns:p14="http://schemas.microsoft.com/office/powerpoint/2010/main" val="1024086991"/>
-      </p:ext>
-    </p:extLst>
   </p:cSld>
   <p:clrMapOvr>
     <a:masterClrMapping/>
@@ -1972,7 +2080,7 @@
 </file>
 
 <file path=ppt/notesSlides/notesSlide9.xml><?xml version="1.0" encoding="utf-8"?>
-<p:notes xmlns:a="http://schemas.openxmlformats.org/drawingml/2006/main" xmlns:r="http://schemas.openxmlformats.org/officeDocument/2006/relationships" xmlns:p="http://schemas.openxmlformats.org/presentationml/2006/main">
+<p:notes xmlns:r="http://schemas.openxmlformats.org/officeDocument/2006/relationships" xmlns:c="http://schemas.openxmlformats.org/drawingml/2006/chart" xmlns:a="http://schemas.openxmlformats.org/drawingml/2006/main" xmlns:dgm="http://schemas.openxmlformats.org/drawingml/2006/diagram" xmlns:dsp="http://schemas.microsoft.com/office/drawing/2008/diagram" xmlns:p="http://schemas.openxmlformats.org/presentationml/2006/main">
   <p:cSld>
     <p:spTree>
       <p:nvGrpSpPr>
@@ -1992,10 +2100,10 @@
         <p:nvSpPr>
           <p:cNvPr id="2" name="Slide Image Placeholder 1"/>
           <p:cNvSpPr>
-            <a:spLocks noGrp="1" noRot="1" noChangeAspect="1"/>
+            <a:spLocks noGrp="1" noRot="1" noChangeAspect="1" noTextEdit="1"/>
           </p:cNvSpPr>
           <p:nvPr>
-            <p:ph type="sldImg"/>
+            <p:ph type="sldImg" idx="0"/>
           </p:nvPr>
         </p:nvSpPr>
         <p:spPr/>
@@ -2015,11 +2123,14 @@
           <a:bodyPr/>
           <a:lstStyle/>
           <a:p>
-            <a:r>
-              <a:rPr lang="en-US" dirty="0"/>
+            <a:pPr lvl="0">
+              <a:defRPr/>
+            </a:pPr>
+            <a:r>
+              <a:rPr lang="ko-KR" altLang="en-US"/>
               <a:t/>
             </a:r>
-            <a:endParaRPr lang="en-US" dirty="0"/>
+            <a:endParaRPr lang="ko-KR" altLang="en-US"/>
           </a:p>
         </p:txBody>
       </p:sp>
@@ -2038,8 +2149,14 @@
           <a:bodyPr/>
           <a:lstStyle/>
           <a:p>
+            <a:pPr lvl="0">
+              <a:defRPr/>
+            </a:pPr>
             <a:fld id="{F7021451-1387-4CA6-816F-3879F97B5CBC}" type="slidenum">
               <a:rPr lang="en-US"/>
+              <a:pPr lvl="0">
+                <a:defRPr/>
+              </a:pPr>
               <a:t>9</a:t>
             </a:fld>
             <a:endParaRPr lang="en-US"/>
@@ -2047,11 +2164,6 @@
         </p:txBody>
       </p:sp>
     </p:spTree>
-    <p:extLst>
-      <p:ext uri="{BB962C8B-B14F-4D97-AF65-F5344CB8AC3E}">
-        <p14:creationId xmlns:p14="http://schemas.microsoft.com/office/powerpoint/2010/main" val="1024086991"/>
-      </p:ext>
-    </p:extLst>
   </p:cSld>
   <p:clrMapOvr>
     <a:masterClrMapping/>
@@ -19289,44 +19401,44 @@
 </file>
 
 <file path=ppt/theme/theme1.xml><?xml version="1.0" encoding="utf-8"?>
-<a:theme xmlns:a="http://schemas.openxmlformats.org/drawingml/2006/main" name="Office Theme">
+<a:theme xmlns:r="http://schemas.openxmlformats.org/officeDocument/2006/relationships" xmlns:c="http://schemas.openxmlformats.org/drawingml/2006/chart" xmlns:dgm="http://schemas.openxmlformats.org/drawingml/2006/diagram" xmlns:dsp="http://schemas.microsoft.com/office/drawing/2008/diagram" xmlns:a="http://schemas.openxmlformats.org/drawingml/2006/main" xmlns:pic="http://schemas.openxmlformats.org/drawingml/2006/picture" xmlns:wp="http://schemas.openxmlformats.org/drawingml/2006/wordprocessingDrawing" xmlns:xdr="http://schemas.openxmlformats.org/drawingml/2006/spreadsheetDrawing" xmlns:lc="http://schemas.openxmlformats.org/drawingml/2006/lockedCanvas" xmlns:p="http://schemas.openxmlformats.org/presentationml/2006/main" name="Office Theme">
   <a:themeElements>
     <a:clrScheme name="Office">
       <a:dk1>
         <a:sysClr val="windowText" lastClr="000000"/>
       </a:dk1>
       <a:lt1>
-        <a:sysClr val="window" lastClr="FFFFFF"/>
+        <a:sysClr val="window" lastClr="ffffff"/>
       </a:lt1>
       <a:dk2>
-        <a:srgbClr val="44546A"/>
+        <a:srgbClr val="44546a"/>
       </a:dk2>
       <a:lt2>
-        <a:srgbClr val="E7E6E6"/>
+        <a:srgbClr val="e7e6e6"/>
       </a:lt2>
       <a:accent1>
-        <a:srgbClr val="4472C4"/>
+        <a:srgbClr val="4472c4"/>
       </a:accent1>
       <a:accent2>
-        <a:srgbClr val="ED7D31"/>
+        <a:srgbClr val="ed7d31"/>
       </a:accent2>
       <a:accent3>
-        <a:srgbClr val="A5A5A5"/>
+        <a:srgbClr val="a5a5a5"/>
       </a:accent3>
       <a:accent4>
-        <a:srgbClr val="FFC000"/>
+        <a:srgbClr val="ffc000"/>
       </a:accent4>
       <a:accent5>
-        <a:srgbClr val="5B9BD5"/>
+        <a:srgbClr val="5b9bd5"/>
       </a:accent5>
       <a:accent6>
-        <a:srgbClr val="70AD47"/>
+        <a:srgbClr val="70ad47"/>
       </a:accent6>
       <a:hlink>
-        <a:srgbClr val="0563C1"/>
+        <a:srgbClr val="0563c1"/>
       </a:hlink>
       <a:folHlink>
-        <a:srgbClr val="954F72"/>
+        <a:srgbClr val="954f72"/>
       </a:folHlink>
     </a:clrScheme>
     <a:fontScheme name="Office">
@@ -19334,7 +19446,7 @@
         <a:latin typeface="Malgun Gothic"/>
         <a:ea typeface=""/>
         <a:cs typeface=""/>
-        <a:font script="Jpan" typeface="游ゴシック Light"/>
+        <a:font script="Jpan" typeface="Yu Gothic Light"/>
         <a:font script="Hang" typeface="맑은 고딕"/>
         <a:font script="Hans" typeface="等线 Light"/>
         <a:font script="Hant" typeface="新細明體"/>
@@ -19386,7 +19498,7 @@
         <a:latin typeface="Malgun Gothic"/>
         <a:ea typeface=""/>
         <a:cs typeface=""/>
-        <a:font script="Jpan" typeface="游ゴシック"/>
+        <a:font script="Jpan" typeface="Yu Gothic"/>
         <a:font script="Hang" typeface="맑은 고딕"/>
         <a:font script="Hans" typeface="等线"/>
         <a:font script="Hant" typeface="新細明體"/>
@@ -19499,21 +19611,21 @@
             <a:schemeClr val="phClr"/>
           </a:solidFill>
           <a:prstDash val="solid"/>
-          <a:miter lim="800000"/>
+          <a:miter/>
         </a:ln>
         <a:ln w="12700" cap="flat" cmpd="sng" algn="ctr">
           <a:solidFill>
             <a:schemeClr val="phClr"/>
           </a:solidFill>
           <a:prstDash val="solid"/>
-          <a:miter lim="800000"/>
+          <a:miter/>
         </a:ln>
         <a:ln w="19050" cap="flat" cmpd="sng" algn="ctr">
           <a:solidFill>
             <a:schemeClr val="phClr"/>
           </a:solidFill>
           <a:prstDash val="solid"/>
-          <a:miter lim="800000"/>
+          <a:miter/>
         </a:ln>
       </a:lnStyleLst>
       <a:effectStyleLst>
@@ -19573,12 +19685,268 @@
       </a:bgFillStyleLst>
     </a:fmtScheme>
   </a:themeElements>
-  <a:objectDefaults/>
-  <a:extraClrSchemeLst/>
-  <a:extLst>
-    <a:ext uri="{05A4C25C-085E-4340-85A3-A5531E510DB2}">
-      <thm15:themeFamily xmlns:thm15="http://schemas.microsoft.com/office/thememl/2012/main" name="Office Theme" id="{62F939B6-93AF-4DB8-9C6B-D6C7DFDC589F}" vid="{4A3C46E8-61CC-4603-A589-7422A47A8E4A}"/>
-    </a:ext>
-  </a:extLst>
+</a:theme>
+</file>
+
+<file path=ppt/theme/theme2.xml><?xml version="1.0" encoding="utf-8"?>
+<a:theme xmlns:r="http://schemas.openxmlformats.org/officeDocument/2006/relationships" xmlns:c="http://schemas.openxmlformats.org/drawingml/2006/chart" xmlns:dgm="http://schemas.openxmlformats.org/drawingml/2006/diagram" xmlns:dsp="http://schemas.microsoft.com/office/drawing/2008/diagram" xmlns:a="http://schemas.openxmlformats.org/drawingml/2006/main" xmlns:pic="http://schemas.openxmlformats.org/drawingml/2006/picture" xmlns:wp="http://schemas.openxmlformats.org/drawingml/2006/wordprocessingDrawing" xmlns:xdr="http://schemas.openxmlformats.org/drawingml/2006/spreadsheetDrawing" xmlns:lc="http://schemas.openxmlformats.org/drawingml/2006/lockedCanvas" xmlns:p="http://schemas.openxmlformats.org/presentationml/2006/main" name="한컴오피스">
+  <a:themeElements>
+    <a:clrScheme name="한컴오피스">
+      <a:dk1>
+        <a:sysClr val="windowText" lastClr="000000"/>
+      </a:dk1>
+      <a:lt1>
+        <a:sysClr val="window" lastClr="ffffff"/>
+      </a:lt1>
+      <a:dk2>
+        <a:srgbClr val="3a3c84"/>
+      </a:dk2>
+      <a:lt2>
+        <a:srgbClr val="faf3db"/>
+      </a:lt2>
+      <a:accent1>
+        <a:srgbClr val="6182d6"/>
+      </a:accent1>
+      <a:accent2>
+        <a:srgbClr val="ff843a"/>
+      </a:accent2>
+      <a:accent3>
+        <a:srgbClr val="b2b2b2"/>
+      </a:accent3>
+      <a:accent4>
+        <a:srgbClr val="ffd700"/>
+      </a:accent4>
+      <a:accent5>
+        <a:srgbClr val="289b6e"/>
+      </a:accent5>
+      <a:accent6>
+        <a:srgbClr val="9d5cbb"/>
+      </a:accent6>
+      <a:hlink>
+        <a:srgbClr val="0000ff"/>
+      </a:hlink>
+      <a:folHlink>
+        <a:srgbClr val="800080"/>
+      </a:folHlink>
+    </a:clrScheme>
+    <a:fontScheme name="한컴오피스">
+      <a:majorFont>
+        <a:latin typeface="Calibri"/>
+        <a:ea typeface=""/>
+        <a:cs typeface=""/>
+        <a:font script="Jpan" typeface="MS PGothic"/>
+        <a:font script="Hang" typeface="맑은 고딕"/>
+        <a:font script="Hans" typeface="SimSun"/>
+        <a:font script="Hant" typeface="新細明體"/>
+        <a:font script="Arab" typeface="Times New Roman"/>
+        <a:font script="Hebr" typeface="Times New Roman"/>
+        <a:font script="Thai" typeface="Angsana New"/>
+        <a:font script="Beng" typeface="Vrinda"/>
+        <a:font script="Gujr" typeface="Shruti"/>
+        <a:font script="Khmr" typeface="MoolBoran"/>
+        <a:font script="Knda" typeface="Tunga"/>
+        <a:font script="Guru" typeface="Raavi"/>
+        <a:font script="Cans" typeface="Euphemia"/>
+        <a:font script="Cher" typeface="Plantagenet Cherokee"/>
+        <a:font script="Yiii" typeface="Microsoft Yi Baiti"/>
+        <a:font script="Tibt" typeface="Microsoft Himalaya"/>
+        <a:font script="Thaa" typeface="MV Boli"/>
+        <a:font script="Deva" typeface="Mangal"/>
+        <a:font script="Telu" typeface="Gautami"/>
+        <a:font script="Taml" typeface="Latha"/>
+        <a:font script="Syrc" typeface="Estrangelo Edessa"/>
+        <a:font script="Orya" typeface="Kalinga"/>
+        <a:font script="Mlym" typeface="Kartika"/>
+        <a:font script="Laoo" typeface="DokChampa"/>
+        <a:font script="Sinh" typeface="Iskoola Pota"/>
+        <a:font script="Mong" typeface="Mongolian Baiti"/>
+        <a:font script="Viet" typeface="Times New Roman"/>
+        <a:font script="Uigh" typeface="Microsoft Uighur"/>
+      </a:majorFont>
+      <a:minorFont>
+        <a:latin typeface="Calibri"/>
+        <a:ea typeface=""/>
+        <a:cs typeface=""/>
+        <a:font script="Jpan" typeface="MS PGothic"/>
+        <a:font script="Hang" typeface="맑은 고딕"/>
+        <a:font script="Hans" typeface="SimSun"/>
+        <a:font script="Hant" typeface="新細明體"/>
+        <a:font script="Arab" typeface="Times New Roman"/>
+        <a:font script="Hebr" typeface="Times New Roman"/>
+        <a:font script="Thai" typeface="Angsana New"/>
+        <a:font script="Beng" typeface="Vrinda"/>
+        <a:font script="Gujr" typeface="Shruti"/>
+        <a:font script="Khmr" typeface="MoolBoran"/>
+        <a:font script="Knda" typeface="Tunga"/>
+        <a:font script="Guru" typeface="Raavi"/>
+        <a:font script="Cans" typeface="Euphemia"/>
+        <a:font script="Cher" typeface="Plantagenet Cherokee"/>
+        <a:font script="Yiii" typeface="Microsoft Yi Baiti"/>
+        <a:font script="Tibt" typeface="Microsoft Himalaya"/>
+        <a:font script="Thaa" typeface="MV Boli"/>
+        <a:font script="Deva" typeface="Mangal"/>
+        <a:font script="Telu" typeface="Gautami"/>
+        <a:font script="Taml" typeface="Latha"/>
+        <a:font script="Syrc" typeface="Estrangelo Edessa"/>
+        <a:font script="Orya" typeface="Kalinga"/>
+        <a:font script="Mlym" typeface="Kartika"/>
+        <a:font script="Laoo" typeface="DokChampa"/>
+        <a:font script="Sinh" typeface="Iskoola Pota"/>
+        <a:font script="Mong" typeface="Mongolian Baiti"/>
+        <a:font script="Viet" typeface="Times New Roman"/>
+        <a:font script="Uigh" typeface="Microsoft Uighur"/>
+      </a:minorFont>
+    </a:fontScheme>
+    <a:fmtScheme name="한컴오피스">
+      <a:fillStyleLst>
+        <a:solidFill>
+          <a:schemeClr val="phClr"/>
+        </a:solidFill>
+        <a:gradFill rotWithShape="1">
+          <a:gsLst>
+            <a:gs pos="0">
+              <a:schemeClr val="phClr">
+                <a:tint val="50000"/>
+                <a:satMod val="300000"/>
+              </a:schemeClr>
+            </a:gs>
+            <a:gs pos="35000">
+              <a:schemeClr val="phClr">
+                <a:tint val="37000"/>
+                <a:satMod val="300000"/>
+              </a:schemeClr>
+            </a:gs>
+            <a:gs pos="100000">
+              <a:schemeClr val="phClr">
+                <a:tint val="15000"/>
+                <a:satMod val="350000"/>
+              </a:schemeClr>
+            </a:gs>
+          </a:gsLst>
+          <a:lin ang="16200000" scaled="1"/>
+        </a:gradFill>
+        <a:gradFill rotWithShape="1">
+          <a:gsLst>
+            <a:gs pos="0">
+              <a:schemeClr val="phClr">
+                <a:shade val="51000"/>
+                <a:satMod val="130000"/>
+              </a:schemeClr>
+            </a:gs>
+            <a:gs pos="80000">
+              <a:schemeClr val="phClr">
+                <a:shade val="93000"/>
+                <a:satMod val="130000"/>
+              </a:schemeClr>
+            </a:gs>
+            <a:gs pos="100000">
+              <a:schemeClr val="phClr">
+                <a:shade val="94000"/>
+                <a:satMod val="135000"/>
+              </a:schemeClr>
+            </a:gs>
+          </a:gsLst>
+          <a:lin ang="16200000" scaled="0"/>
+        </a:gradFill>
+      </a:fillStyleLst>
+      <a:lnStyleLst>
+        <a:ln w="12700" cap="flat" cmpd="sng" algn="ctr">
+          <a:solidFill>
+            <a:schemeClr val="phClr">
+              <a:satMod val="105000"/>
+            </a:schemeClr>
+          </a:solidFill>
+          <a:prstDash val="solid"/>
+        </a:ln>
+        <a:ln w="19050" cap="flat" cmpd="sng" algn="ctr">
+          <a:solidFill>
+            <a:schemeClr val="phClr"/>
+          </a:solidFill>
+          <a:prstDash val="solid"/>
+        </a:ln>
+        <a:ln w="38100" cap="flat" cmpd="sng" algn="ctr">
+          <a:solidFill>
+            <a:schemeClr val="phClr"/>
+          </a:solidFill>
+          <a:prstDash val="solid"/>
+        </a:ln>
+      </a:lnStyleLst>
+      <a:effectStyleLst>
+        <a:effectStyle>
+          <a:effectLst>
+            <a:outerShdw blurRad="38100" dist="25400" dir="5400000" rotWithShape="0">
+              <a:srgbClr val="000000">
+                <a:alpha val="75000"/>
+              </a:srgbClr>
+            </a:outerShdw>
+          </a:effectLst>
+        </a:effectStyle>
+        <a:effectStyle>
+          <a:effectLst>
+            <a:outerShdw blurRad="38100" dist="25400" dir="5400000" rotWithShape="0">
+              <a:srgbClr val="000000">
+                <a:alpha val="75000"/>
+              </a:srgbClr>
+            </a:outerShdw>
+          </a:effectLst>
+        </a:effectStyle>
+        <a:effectStyle>
+          <a:effectLst>
+            <a:reflection blurRad="12700" stA="26000" endPos="28000" dist="38100" dir="5400000" sy="-100000" rotWithShape="0"/>
+          </a:effectLst>
+        </a:effectStyle>
+      </a:effectStyleLst>
+      <a:bgFillStyleLst>
+        <a:solidFill>
+          <a:schemeClr val="phClr"/>
+        </a:solidFill>
+        <a:gradFill rotWithShape="1">
+          <a:gsLst>
+            <a:gs pos="0">
+              <a:schemeClr val="phClr">
+                <a:tint val="40000"/>
+                <a:satMod val="350000"/>
+              </a:schemeClr>
+            </a:gs>
+            <a:gs pos="40000">
+              <a:schemeClr val="phClr">
+                <a:tint val="45000"/>
+                <a:shade val="99000"/>
+                <a:satMod val="350000"/>
+              </a:schemeClr>
+            </a:gs>
+            <a:gs pos="100000">
+              <a:schemeClr val="phClr">
+                <a:shade val="20000"/>
+                <a:satMod val="255000"/>
+              </a:schemeClr>
+            </a:gs>
+          </a:gsLst>
+          <a:path path="circle">
+            <a:fillToRect l="50000" t="-80000" r="50000" b="180000"/>
+          </a:path>
+        </a:gradFill>
+        <a:gradFill rotWithShape="1">
+          <a:gsLst>
+            <a:gs pos="0">
+              <a:schemeClr val="phClr">
+                <a:tint val="80000"/>
+                <a:satMod val="300000"/>
+              </a:schemeClr>
+            </a:gs>
+            <a:gs pos="100000">
+              <a:schemeClr val="phClr">
+                <a:shade val="30000"/>
+                <a:satMod val="200000"/>
+              </a:schemeClr>
+            </a:gs>
+          </a:gsLst>
+          <a:path path="circle">
+            <a:fillToRect l="50000" t="50000" r="50000" b="50000"/>
+          </a:path>
+        </a:gradFill>
+      </a:bgFillStyleLst>
+    </a:fmtScheme>
+  </a:themeElements>
 </a:theme>
 </file>